--- a/book/slides/pptx/ch10-search.pptx
+++ b/book/slides/pptx/ch10-search.pptx
@@ -19809,4 +19809,116 @@
     </a:fmtScheme>
   </a:themeElements>
 </a:theme>
+</file>
+
+<file path=ppt/theme/theme2.xml><?xml version="1.0" encoding="utf-8"?>
+<a:theme xmlns:a="http://schemas.openxmlformats.org/drawingml/2006/main" name="dsa">
+  <a:themeElements>
+    <a:clrScheme name="dsa">
+      <a:dk1>
+        <a:sysClr val="windowText" lastClr="000000"/>
+      </a:dk1>
+      <a:lt1>
+        <a:sysClr val="window" lastClr="FFFFFF"/>
+      </a:lt1>
+      <a:dk2>
+        <a:srgbClr val="1A1A18"/>
+      </a:dk2>
+      <a:lt2>
+        <a:srgbClr val="FDFDFC"/>
+      </a:lt2>
+      <a:accent1>
+        <a:srgbClr val="8A4B2A"/>
+      </a:accent1>
+      <a:accent2>
+        <a:srgbClr val="2C6B57"/>
+      </a:accent2>
+      <a:accent3>
+        <a:srgbClr val="7A5C1E"/>
+      </a:accent3>
+      <a:accent4>
+        <a:srgbClr val="4A5AA8"/>
+      </a:accent4>
+      <a:accent5>
+        <a:srgbClr val="6B6B66"/>
+      </a:accent5>
+      <a:accent6>
+        <a:srgbClr val="DCDCD6"/>
+      </a:accent6>
+      <a:hlink>
+        <a:srgbClr val="8A4B2A"/>
+      </a:hlink>
+      <a:folHlink>
+        <a:srgbClr val="6B6B66"/>
+      </a:folHlink>
+    </a:clrScheme>
+    <a:fontScheme name="dsa">
+      <a:majorFont>
+        <a:latin typeface="Segoe UI"/>
+        <a:ea typeface="Noto Sans CJK SC"/>
+        <a:cs typeface=""/>
+      </a:majorFont>
+      <a:minorFont>
+        <a:latin typeface="Segoe UI"/>
+        <a:ea typeface="Noto Sans CJK SC"/>
+        <a:cs typeface=""/>
+      </a:minorFont>
+    </a:fontScheme>
+    <a:fmtScheme name="dsa">
+      <a:fillStyleLst>
+        <a:solidFill>
+          <a:schemeClr val="phClr"/>
+        </a:solidFill>
+        <a:solidFill>
+          <a:schemeClr val="phClr"/>
+        </a:solidFill>
+        <a:solidFill>
+          <a:schemeClr val="phClr"/>
+        </a:solidFill>
+      </a:fillStyleLst>
+      <a:lnStyleLst>
+        <a:ln w="6350" cap="flat" cmpd="sng" algn="ctr">
+          <a:solidFill>
+            <a:schemeClr val="phClr"/>
+          </a:solidFill>
+          <a:prstDash val="solid"/>
+        </a:ln>
+        <a:ln w="6350" cap="flat" cmpd="sng" algn="ctr">
+          <a:solidFill>
+            <a:schemeClr val="phClr"/>
+          </a:solidFill>
+          <a:prstDash val="solid"/>
+        </a:ln>
+        <a:ln w="6350" cap="flat" cmpd="sng" algn="ctr">
+          <a:solidFill>
+            <a:schemeClr val="phClr"/>
+          </a:solidFill>
+          <a:prstDash val="solid"/>
+        </a:ln>
+      </a:lnStyleLst>
+      <a:effectStyleLst>
+        <a:effectStyle>
+          <a:effectLst/>
+        </a:effectStyle>
+        <a:effectStyle>
+          <a:effectLst/>
+        </a:effectStyle>
+        <a:effectStyle>
+          <a:effectLst/>
+        </a:effectStyle>
+      </a:effectStyleLst>
+      <a:bgFillStyleLst>
+        <a:solidFill>
+          <a:schemeClr val="phClr"/>
+        </a:solidFill>
+        <a:solidFill>
+          <a:schemeClr val="phClr"/>
+        </a:solidFill>
+        <a:solidFill>
+          <a:schemeClr val="phClr"/>
+        </a:solidFill>
+      </a:bgFillStyleLst>
+    </a:fmtScheme>
+  </a:themeElements>
+</a:theme>
 </file>
--- a/book/slides/pptx/ch10-search.pptx
+++ b/book/slides/pptx/ch10-search.pptx
@@ -1962,8 +1962,8 @@
         </p:nvSpPr>
         <p:spPr>
           <a:xfrm>
-            <a:off x="566928" y="1307862"/>
-            <a:ext cx="11058144" cy="327766"/>
+            <a:off x="566928" y="1200262"/>
+            <a:ext cx="11058144" cy="287944"/>
           </a:xfrm>
           <a:prstGeom prst="rect">
             <a:avLst/>
@@ -1983,7 +1983,7 @@
               <a:buNone/>
             </a:pPr>
             <a:r>
-              <a:rPr lang="zh-CN" sz="1926" dirty="0">
+              <a:rPr lang="zh-CN" sz="1692" dirty="0">
                 <a:solidFill>
                   <a:srgbClr val="1A1A18"/>
                 </a:solidFill>
@@ -1994,7 +1994,7 @@
               <a:t>好的散列函数要</a:t>
             </a:r>
             <a:r>
-              <a:rPr lang="zh-CN" sz="1926" dirty="0" b="1">
+              <a:rPr lang="zh-CN" sz="1692" dirty="0" b="1">
                 <a:solidFill>
                   <a:srgbClr val="8A4B2A"/>
                 </a:solidFill>
@@ -2005,7 +2005,7 @@
               <a:t>算得快</a:t>
             </a:r>
             <a:r>
-              <a:rPr lang="zh-CN" sz="1926" dirty="0">
+              <a:rPr lang="zh-CN" sz="1692" dirty="0">
                 <a:solidFill>
                   <a:srgbClr val="1A1A18"/>
                 </a:solidFill>
@@ -2016,7 +2016,7 @@
               <a:t>，并且</a:t>
             </a:r>
             <a:r>
-              <a:rPr lang="zh-CN" sz="1926" dirty="0" b="1">
+              <a:rPr lang="zh-CN" sz="1692" dirty="0" b="1">
                 <a:solidFill>
                   <a:srgbClr val="8A4B2A"/>
                 </a:solidFill>
@@ -2027,7 +2027,7 @@
               <a:t>把地址铺匀</a:t>
             </a:r>
             <a:r>
-              <a:rPr lang="zh-CN" sz="1926" dirty="0">
+              <a:rPr lang="zh-CN" sz="1692" dirty="0">
                 <a:solidFill>
                   <a:srgbClr val="1A1A18"/>
                 </a:solidFill>
@@ -2048,8 +2048,8 @@
         </p:nvSpPr>
         <p:spPr>
           <a:xfrm>
-            <a:off x="566928" y="1689984"/>
-            <a:ext cx="11058144" cy="327766"/>
+            <a:off x="566928" y="1535958"/>
+            <a:ext cx="11058144" cy="287944"/>
           </a:xfrm>
           <a:prstGeom prst="rect">
             <a:avLst/>
@@ -2069,7 +2069,7 @@
               <a:buNone/>
             </a:pPr>
             <a:r>
-              <a:rPr lang="zh-CN" sz="1926" dirty="0">
+              <a:rPr lang="zh-CN" sz="1692" dirty="0">
                 <a:solidFill>
                   <a:srgbClr val="1A1A18"/>
                 </a:solidFill>
@@ -2080,7 +2080,7 @@
               <a:t>常见做法：除留余数（</a:t>
             </a:r>
             <a:r>
-              <a:rPr lang="zh-CN" sz="1926" dirty="0" i="1">
+              <a:rPr lang="zh-CN" sz="1692" dirty="0" i="1">
                 <a:solidFill>
                   <a:srgbClr val="1A1A18"/>
                 </a:solidFill>
@@ -2091,7 +2091,7 @@
               <a:t>h(k) = k mod m</a:t>
             </a:r>
             <a:r>
-              <a:rPr lang="zh-CN" sz="1926" dirty="0">
+              <a:rPr lang="zh-CN" sz="1692" dirty="0">
                 <a:solidFill>
                   <a:srgbClr val="1A1A18"/>
                 </a:solidFill>
@@ -2112,8 +2112,8 @@
         </p:nvSpPr>
         <p:spPr>
           <a:xfrm>
-            <a:off x="566928" y="2126462"/>
-            <a:ext cx="11058144" cy="3971300"/>
+            <a:off x="566928" y="1919406"/>
+            <a:ext cx="11058144" cy="4292559"/>
           </a:xfrm>
           <a:prstGeom prst="roundRect">
             <a:avLst>
@@ -2142,7 +2142,7 @@
               <a:buNone/>
             </a:pPr>
             <a:r>
-              <a:rPr lang="zh-CN" sz="1001" dirty="0">
+              <a:rPr lang="zh-CN" sz="879" dirty="0">
                 <a:solidFill>
                   <a:srgbClr val="6B6B66"/>
                 </a:solidFill>
@@ -2161,7 +2161,7 @@
               <a:buNone/>
             </a:pPr>
             <a:r>
-              <a:rPr lang="zh-CN" sz="1284" dirty="0">
+              <a:rPr lang="zh-CN" sz="1128" dirty="0">
                 <a:solidFill>
                   <a:srgbClr val="8A8A84"/>
                 </a:solidFill>
@@ -2180,7 +2180,7 @@
               <a:buNone/>
             </a:pPr>
             <a:r>
-              <a:rPr lang="zh-CN" sz="1284" dirty="0">
+              <a:rPr lang="zh-CN" sz="1128" dirty="0">
                 <a:solidFill>
                   <a:srgbClr val="8A8A84"/>
                 </a:solidFill>
@@ -2199,7 +2199,7 @@
               <a:buNone/>
             </a:pPr>
             <a:r>
-              <a:rPr lang="zh-CN" sz="1284" dirty="0">
+              <a:rPr lang="zh-CN" sz="1128" dirty="0">
                 <a:solidFill>
                   <a:srgbClr val="8A8A84"/>
                 </a:solidFill>
@@ -2218,7 +2218,7 @@
               <a:buNone/>
             </a:pPr>
             <a:r>
-              <a:rPr lang="zh-CN" sz="1284" dirty="0">
+              <a:rPr lang="zh-CN" sz="1128" dirty="0">
                 <a:solidFill>
                   <a:srgbClr val="8A8A84"/>
                 </a:solidFill>
@@ -2237,7 +2237,83 @@
               <a:buNone/>
             </a:pPr>
             <a:r>
-              <a:rPr lang="zh-CN" sz="1284" dirty="0">
+              <a:rPr lang="zh-CN" sz="1128" dirty="0">
+                <a:solidFill>
+                  <a:srgbClr val="8A8A84"/>
+                </a:solidFill>
+                <a:latin typeface="Noto Sans Mono CJK SC"/>
+                <a:ea typeface="Noto Sans Mono CJK SC"/>
+                <a:cs typeface="Noto Sans Mono CJK SC"/>
+              </a:rPr>
+              <a:t>//</a:t>
+            </a:r>
+          </a:p>
+          <a:p>
+            <a:pPr marL="0" indent="0" lvl="0">
+              <a:lnSpc>
+                <a:spcPct val="104000"/>
+              </a:lnSpc>
+              <a:buNone/>
+            </a:pPr>
+            <a:r>
+              <a:rPr lang="zh-CN" sz="1128" dirty="0">
+                <a:solidFill>
+                  <a:srgbClr val="8A8A84"/>
+                </a:solidFill>
+                <a:latin typeface="Noto Sans Mono CJK SC"/>
+                <a:ea typeface="Noto Sans Mono CJK SC"/>
+                <a:cs typeface="Noto Sans Mono CJK SC"/>
+              </a:rPr>
+              <a:t>// 中间值用 32 位的 `std::uint32_t`：ELF 散列是按 32 位定义的。若用 64 位的</a:t>
+            </a:r>
+          </a:p>
+          <a:p>
+            <a:pPr marL="0" indent="0" lvl="0">
+              <a:lnSpc>
+                <a:spcPct val="104000"/>
+              </a:lnSpc>
+              <a:buNone/>
+            </a:pPr>
+            <a:r>
+              <a:rPr lang="zh-CN" sz="1128" dirty="0">
+                <a:solidFill>
+                  <a:srgbClr val="8A8A84"/>
+                </a:solidFill>
+                <a:latin typeface="Noto Sans Mono CJK SC"/>
+                <a:ea typeface="Noto Sans Mono CJK SC"/>
+                <a:cs typeface="Noto Sans Mono CJK SC"/>
+              </a:rPr>
+              <a:t>// `std::size_t`，`hash &lt;&lt; 4` 再加一个字节可能进位到第 32 位，下面只清第 28–31 位，</a:t>
+            </a:r>
+          </a:p>
+          <a:p>
+            <a:pPr marL="0" indent="0" lvl="0">
+              <a:lnSpc>
+                <a:spcPct val="104000"/>
+              </a:lnSpc>
+              <a:buNone/>
+            </a:pPr>
+            <a:r>
+              <a:rPr lang="zh-CN" sz="1128" dirty="0">
+                <a:solidFill>
+                  <a:srgbClr val="8A8A84"/>
+                </a:solidFill>
+                <a:latin typeface="Noto Sans Mono CJK SC"/>
+                <a:ea typeface="Noto Sans Mono CJK SC"/>
+                <a:cs typeface="Noto Sans Mono CJK SC"/>
+              </a:rPr>
+              <a:t>// 那一位就永远留着，结果与经典 ELF 散列不同。</a:t>
+            </a:r>
+          </a:p>
+          <a:p>
+            <a:pPr marL="0" indent="0" lvl="0">
+              <a:lnSpc>
+                <a:spcPct val="104000"/>
+              </a:lnSpc>
+              <a:buNone/>
+            </a:pPr>
+            <a:r>
+              <a:rPr lang="zh-CN" sz="1128" dirty="0">
                 <a:solidFill>
                   <a:srgbClr val="8A4B2A"/>
                 </a:solidFill>
@@ -2248,7 +2324,7 @@
               <a:t>inline</a:t>
             </a:r>
             <a:r>
-              <a:rPr lang="zh-CN" sz="1284" dirty="0">
+              <a:rPr lang="zh-CN" sz="1128" dirty="0">
                 <a:solidFill>
                   <a:srgbClr val="1A1A18"/>
                 </a:solidFill>
@@ -2259,7 +2335,7 @@
               <a:t> std::</a:t>
             </a:r>
             <a:r>
-              <a:rPr lang="zh-CN" sz="1284" dirty="0">
+              <a:rPr lang="zh-CN" sz="1128" dirty="0">
                 <a:solidFill>
                   <a:srgbClr val="2C6B57"/>
                 </a:solidFill>
@@ -2270,7 +2346,7 @@
               <a:t>size_t</a:t>
             </a:r>
             <a:r>
-              <a:rPr lang="zh-CN" sz="1284" dirty="0">
+              <a:rPr lang="zh-CN" sz="1128" dirty="0">
                 <a:solidFill>
                   <a:srgbClr val="1A1A18"/>
                 </a:solidFill>
@@ -2281,7 +2357,7 @@
               <a:t> elf_hash(</a:t>
             </a:r>
             <a:r>
-              <a:rPr lang="zh-CN" sz="1284" dirty="0">
+              <a:rPr lang="zh-CN" sz="1128" dirty="0">
                 <a:solidFill>
                   <a:srgbClr val="8A4B2A"/>
                 </a:solidFill>
@@ -2292,7 +2368,7 @@
               <a:t>const</a:t>
             </a:r>
             <a:r>
-              <a:rPr lang="zh-CN" sz="1284" dirty="0">
+              <a:rPr lang="zh-CN" sz="1128" dirty="0">
                 <a:solidFill>
                   <a:srgbClr val="1A1A18"/>
                 </a:solidFill>
@@ -2311,18 +2387,81 @@
               <a:buNone/>
             </a:pPr>
             <a:r>
-              <a:rPr lang="zh-CN" sz="1284" dirty="0">
-                <a:solidFill>
-                  <a:srgbClr val="1A1A18"/>
-                </a:solidFill>
-                <a:latin typeface="Noto Sans Mono CJK SC"/>
-                <a:ea typeface="Noto Sans Mono CJK SC"/>
-                <a:cs typeface="Noto Sans Mono CJK SC"/>
-              </a:rPr>
-              <a:t>    std::</a:t>
-            </a:r>
-            <a:r>
-              <a:rPr lang="zh-CN" sz="1284" dirty="0">
+              <a:rPr lang="zh-CN" sz="1128" dirty="0">
+                <a:solidFill>
+                  <a:srgbClr val="1A1A18"/>
+                </a:solidFill>
+                <a:latin typeface="Noto Sans Mono CJK SC"/>
+                <a:ea typeface="Noto Sans Mono CJK SC"/>
+                <a:cs typeface="Noto Sans Mono CJK SC"/>
+              </a:rPr>
+              <a:t>    std::uint32_t hash = </a:t>
+            </a:r>
+            <a:r>
+              <a:rPr lang="zh-CN" sz="1128" dirty="0">
+                <a:solidFill>
+                  <a:srgbClr val="4A5AA8"/>
+                </a:solidFill>
+                <a:latin typeface="Noto Sans Mono CJK SC"/>
+                <a:ea typeface="Noto Sans Mono CJK SC"/>
+                <a:cs typeface="Noto Sans Mono CJK SC"/>
+              </a:rPr>
+              <a:t>0</a:t>
+            </a:r>
+            <a:r>
+              <a:rPr lang="zh-CN" sz="1128" dirty="0">
+                <a:solidFill>
+                  <a:srgbClr val="1A1A18"/>
+                </a:solidFill>
+                <a:latin typeface="Noto Sans Mono CJK SC"/>
+                <a:ea typeface="Noto Sans Mono CJK SC"/>
+                <a:cs typeface="Noto Sans Mono CJK SC"/>
+              </a:rPr>
+              <a:t>;</a:t>
+            </a:r>
+          </a:p>
+          <a:p>
+            <a:pPr marL="0" indent="0" lvl="0">
+              <a:lnSpc>
+                <a:spcPct val="104000"/>
+              </a:lnSpc>
+              <a:buNone/>
+            </a:pPr>
+            <a:r>
+              <a:rPr lang="zh-CN" sz="1128" dirty="0">
+                <a:solidFill>
+                  <a:srgbClr val="1A1A18"/>
+                </a:solidFill>
+                <a:latin typeface="Noto Sans Mono CJK SC"/>
+                <a:ea typeface="Noto Sans Mono CJK SC"/>
+                <a:cs typeface="Noto Sans Mono CJK SC"/>
+              </a:rPr>
+              <a:t>    </a:t>
+            </a:r>
+            <a:r>
+              <a:rPr lang="zh-CN" sz="1128" dirty="0">
+                <a:solidFill>
+                  <a:srgbClr val="8A4B2A"/>
+                </a:solidFill>
+                <a:latin typeface="Noto Sans Mono CJK SC"/>
+                <a:ea typeface="Noto Sans Mono CJK SC"/>
+                <a:cs typeface="Noto Sans Mono CJK SC"/>
+              </a:rPr>
+              <a:t>for</a:t>
+            </a:r>
+            <a:r>
+              <a:rPr lang="zh-CN" sz="1128" dirty="0">
+                <a:solidFill>
+                  <a:srgbClr val="1A1A18"/>
+                </a:solidFill>
+                <a:latin typeface="Noto Sans Mono CJK SC"/>
+                <a:ea typeface="Noto Sans Mono CJK SC"/>
+                <a:cs typeface="Noto Sans Mono CJK SC"/>
+              </a:rPr>
+              <a:t> (</a:t>
+            </a:r>
+            <a:r>
+              <a:rPr lang="zh-CN" sz="1128" dirty="0">
                 <a:solidFill>
                   <a:srgbClr val="2C6B57"/>
                 </a:solidFill>
@@ -2330,21 +2469,62 @@
                 <a:ea typeface="Noto Sans Mono CJK SC"/>
                 <a:cs typeface="Noto Sans Mono CJK SC"/>
               </a:rPr>
-              <a:t>size_t</a:t>
-            </a:r>
-            <a:r>
-              <a:rPr lang="zh-CN" sz="1284" dirty="0">
-                <a:solidFill>
-                  <a:srgbClr val="1A1A18"/>
-                </a:solidFill>
-                <a:latin typeface="Noto Sans Mono CJK SC"/>
-                <a:ea typeface="Noto Sans Mono CJK SC"/>
-                <a:cs typeface="Noto Sans Mono CJK SC"/>
-              </a:rPr>
-              <a:t> hash = </a:t>
-            </a:r>
-            <a:r>
-              <a:rPr lang="zh-CN" sz="1284" dirty="0">
+              <a:t>unsigned</a:t>
+            </a:r>
+            <a:r>
+              <a:rPr lang="zh-CN" sz="1128" dirty="0">
+                <a:solidFill>
+                  <a:srgbClr val="1A1A18"/>
+                </a:solidFill>
+                <a:latin typeface="Noto Sans Mono CJK SC"/>
+                <a:ea typeface="Noto Sans Mono CJK SC"/>
+                <a:cs typeface="Noto Sans Mono CJK SC"/>
+              </a:rPr>
+              <a:t> </a:t>
+            </a:r>
+            <a:r>
+              <a:rPr lang="zh-CN" sz="1128" dirty="0">
+                <a:solidFill>
+                  <a:srgbClr val="2C6B57"/>
+                </a:solidFill>
+                <a:latin typeface="Noto Sans Mono CJK SC"/>
+                <a:ea typeface="Noto Sans Mono CJK SC"/>
+                <a:cs typeface="Noto Sans Mono CJK SC"/>
+              </a:rPr>
+              <a:t>char</a:t>
+            </a:r>
+            <a:r>
+              <a:rPr lang="zh-CN" sz="1128" dirty="0">
+                <a:solidFill>
+                  <a:srgbClr val="1A1A18"/>
+                </a:solidFill>
+                <a:latin typeface="Noto Sans Mono CJK SC"/>
+                <a:ea typeface="Noto Sans Mono CJK SC"/>
+                <a:cs typeface="Noto Sans Mono CJK SC"/>
+              </a:rPr>
+              <a:t> character : text) {</a:t>
+            </a:r>
+          </a:p>
+          <a:p>
+            <a:pPr marL="0" indent="0" lvl="0">
+              <a:lnSpc>
+                <a:spcPct val="104000"/>
+              </a:lnSpc>
+              <a:buNone/>
+            </a:pPr>
+            <a:r>
+              <a:rPr lang="zh-CN" sz="1128" dirty="0">
+                <a:solidFill>
+                  <a:srgbClr val="1A1A18"/>
+                </a:solidFill>
+                <a:latin typeface="Noto Sans Mono CJK SC"/>
+                <a:ea typeface="Noto Sans Mono CJK SC"/>
+                <a:cs typeface="Noto Sans Mono CJK SC"/>
+              </a:rPr>
+              <a:t>        hash = (hash &lt;&lt; </a:t>
+            </a:r>
+            <a:r>
+              <a:rPr lang="zh-CN" sz="1128" dirty="0">
                 <a:solidFill>
                   <a:srgbClr val="4A5AA8"/>
                 </a:solidFill>
@@ -2352,18 +2532,144 @@
                 <a:ea typeface="Noto Sans Mono CJK SC"/>
                 <a:cs typeface="Noto Sans Mono CJK SC"/>
               </a:rPr>
+              <a:t>4U</a:t>
+            </a:r>
+            <a:r>
+              <a:rPr lang="zh-CN" sz="1128" dirty="0">
+                <a:solidFill>
+                  <a:srgbClr val="1A1A18"/>
+                </a:solidFill>
+                <a:latin typeface="Noto Sans Mono CJK SC"/>
+                <a:ea typeface="Noto Sans Mono CJK SC"/>
+                <a:cs typeface="Noto Sans Mono CJK SC"/>
+              </a:rPr>
+              <a:t>) + character;        </a:t>
+            </a:r>
+            <a:r>
+              <a:rPr lang="zh-CN" sz="1128" dirty="0">
+                <a:solidFill>
+                  <a:srgbClr val="8A8A84"/>
+                </a:solidFill>
+                <a:latin typeface="Noto Sans Mono CJK SC"/>
+                <a:ea typeface="Noto Sans Mono CJK SC"/>
+                <a:cs typeface="Noto Sans Mono CJK SC"/>
+              </a:rPr>
+              <a:t>// 左移 4 位，腾出位置放新字节</a:t>
+            </a:r>
+          </a:p>
+          <a:p>
+            <a:pPr marL="0" indent="0" lvl="0">
+              <a:lnSpc>
+                <a:spcPct val="104000"/>
+              </a:lnSpc>
+              <a:buNone/>
+            </a:pPr>
+            <a:r>
+              <a:rPr lang="zh-CN" sz="1128" dirty="0">
+                <a:solidFill>
+                  <a:srgbClr val="1A1A18"/>
+                </a:solidFill>
+                <a:latin typeface="Noto Sans Mono CJK SC"/>
+                <a:ea typeface="Noto Sans Mono CJK SC"/>
+                <a:cs typeface="Noto Sans Mono CJK SC"/>
+              </a:rPr>
+              <a:t>        std::uint32_t high_bits = hash &amp; </a:t>
+            </a:r>
+            <a:r>
+              <a:rPr lang="zh-CN" sz="1128" dirty="0">
+                <a:solidFill>
+                  <a:srgbClr val="4A5AA8"/>
+                </a:solidFill>
+                <a:latin typeface="Noto Sans Mono CJK SC"/>
+                <a:ea typeface="Noto Sans Mono CJK SC"/>
+                <a:cs typeface="Noto Sans Mono CJK SC"/>
+              </a:rPr>
+              <a:t>0xF0000000U</a:t>
+            </a:r>
+            <a:r>
+              <a:rPr lang="zh-CN" sz="1128" dirty="0">
+                <a:solidFill>
+                  <a:srgbClr val="1A1A18"/>
+                </a:solidFill>
+                <a:latin typeface="Noto Sans Mono CJK SC"/>
+                <a:ea typeface="Noto Sans Mono CJK SC"/>
+                <a:cs typeface="Noto Sans Mono CJK SC"/>
+              </a:rPr>
+              <a:t>;   </a:t>
+            </a:r>
+            <a:r>
+              <a:rPr lang="zh-CN" sz="1128" dirty="0">
+                <a:solidFill>
+                  <a:srgbClr val="8A8A84"/>
+                </a:solidFill>
+                <a:latin typeface="Noto Sans Mono CJK SC"/>
+                <a:ea typeface="Noto Sans Mono CJK SC"/>
+                <a:cs typeface="Noto Sans Mono CJK SC"/>
+              </a:rPr>
+              <a:t>// 溢出到高 4 位的那部分</a:t>
+            </a:r>
+          </a:p>
+          <a:p>
+            <a:pPr marL="0" indent="0" lvl="0">
+              <a:lnSpc>
+                <a:spcPct val="104000"/>
+              </a:lnSpc>
+              <a:buNone/>
+            </a:pPr>
+            <a:r>
+              <a:rPr lang="zh-CN" sz="1128" dirty="0">
+                <a:solidFill>
+                  <a:srgbClr val="1A1A18"/>
+                </a:solidFill>
+                <a:latin typeface="Noto Sans Mono CJK SC"/>
+                <a:ea typeface="Noto Sans Mono CJK SC"/>
+                <a:cs typeface="Noto Sans Mono CJK SC"/>
+              </a:rPr>
+              <a:t>        </a:t>
+            </a:r>
+            <a:r>
+              <a:rPr lang="zh-CN" sz="1128" dirty="0">
+                <a:solidFill>
+                  <a:srgbClr val="8A4B2A"/>
+                </a:solidFill>
+                <a:latin typeface="Noto Sans Mono CJK SC"/>
+                <a:ea typeface="Noto Sans Mono CJK SC"/>
+                <a:cs typeface="Noto Sans Mono CJK SC"/>
+              </a:rPr>
+              <a:t>if</a:t>
+            </a:r>
+            <a:r>
+              <a:rPr lang="zh-CN" sz="1128" dirty="0">
+                <a:solidFill>
+                  <a:srgbClr val="1A1A18"/>
+                </a:solidFill>
+                <a:latin typeface="Noto Sans Mono CJK SC"/>
+                <a:ea typeface="Noto Sans Mono CJK SC"/>
+                <a:cs typeface="Noto Sans Mono CJK SC"/>
+              </a:rPr>
+              <a:t> (high_bits != </a:t>
+            </a:r>
+            <a:r>
+              <a:rPr lang="zh-CN" sz="1128" dirty="0">
+                <a:solidFill>
+                  <a:srgbClr val="4A5AA8"/>
+                </a:solidFill>
+                <a:latin typeface="Noto Sans Mono CJK SC"/>
+                <a:ea typeface="Noto Sans Mono CJK SC"/>
+                <a:cs typeface="Noto Sans Mono CJK SC"/>
+              </a:rPr>
               <a:t>0</a:t>
             </a:r>
             <a:r>
-              <a:rPr lang="zh-CN" sz="1284" dirty="0">
-                <a:solidFill>
-                  <a:srgbClr val="1A1A18"/>
-                </a:solidFill>
-                <a:latin typeface="Noto Sans Mono CJK SC"/>
-                <a:ea typeface="Noto Sans Mono CJK SC"/>
-                <a:cs typeface="Noto Sans Mono CJK SC"/>
-              </a:rPr>
-              <a:t>;</a:t>
+              <a:rPr lang="zh-CN" sz="1128" dirty="0">
+                <a:solidFill>
+                  <a:srgbClr val="1A1A18"/>
+                </a:solidFill>
+                <a:latin typeface="Noto Sans Mono CJK SC"/>
+                <a:ea typeface="Noto Sans Mono CJK SC"/>
+                <a:cs typeface="Noto Sans Mono CJK SC"/>
+              </a:rPr>
+              <a:t>) {</a:t>
             </a:r>
           </a:p>
           <a:p>
@@ -2374,7 +2680,127 @@
               <a:buNone/>
             </a:pPr>
             <a:r>
-              <a:rPr lang="zh-CN" sz="1284" dirty="0">
+              <a:rPr lang="zh-CN" sz="1128" dirty="0">
+                <a:solidFill>
+                  <a:srgbClr val="1A1A18"/>
+                </a:solidFill>
+                <a:latin typeface="Noto Sans Mono CJK SC"/>
+                <a:ea typeface="Noto Sans Mono CJK SC"/>
+                <a:cs typeface="Noto Sans Mono CJK SC"/>
+              </a:rPr>
+              <a:t>            hash ^= high_bits &gt;&gt; </a:t>
+            </a:r>
+            <a:r>
+              <a:rPr lang="zh-CN" sz="1128" dirty="0">
+                <a:solidFill>
+                  <a:srgbClr val="4A5AA8"/>
+                </a:solidFill>
+                <a:latin typeface="Noto Sans Mono CJK SC"/>
+                <a:ea typeface="Noto Sans Mono CJK SC"/>
+                <a:cs typeface="Noto Sans Mono CJK SC"/>
+              </a:rPr>
+              <a:t>24U</a:t>
+            </a:r>
+            <a:r>
+              <a:rPr lang="zh-CN" sz="1128" dirty="0">
+                <a:solidFill>
+                  <a:srgbClr val="1A1A18"/>
+                </a:solidFill>
+                <a:latin typeface="Noto Sans Mono CJK SC"/>
+                <a:ea typeface="Noto Sans Mono CJK SC"/>
+                <a:cs typeface="Noto Sans Mono CJK SC"/>
+              </a:rPr>
+              <a:t>;           </a:t>
+            </a:r>
+            <a:r>
+              <a:rPr lang="zh-CN" sz="1128" dirty="0">
+                <a:solidFill>
+                  <a:srgbClr val="8A8A84"/>
+                </a:solidFill>
+                <a:latin typeface="Noto Sans Mono CJK SC"/>
+                <a:ea typeface="Noto Sans Mono CJK SC"/>
+                <a:cs typeface="Noto Sans Mono CJK SC"/>
+              </a:rPr>
+              <a:t>// 折回低位，别让它白白丢掉</a:t>
+            </a:r>
+          </a:p>
+          <a:p>
+            <a:pPr marL="0" indent="0" lvl="0">
+              <a:lnSpc>
+                <a:spcPct val="104000"/>
+              </a:lnSpc>
+              <a:buNone/>
+            </a:pPr>
+            <a:r>
+              <a:rPr lang="zh-CN" sz="1128" dirty="0">
+                <a:solidFill>
+                  <a:srgbClr val="1A1A18"/>
+                </a:solidFill>
+                <a:latin typeface="Noto Sans Mono CJK SC"/>
+                <a:ea typeface="Noto Sans Mono CJK SC"/>
+                <a:cs typeface="Noto Sans Mono CJK SC"/>
+              </a:rPr>
+              <a:t>        }</a:t>
+            </a:r>
+          </a:p>
+          <a:p>
+            <a:pPr marL="0" indent="0" lvl="0">
+              <a:lnSpc>
+                <a:spcPct val="104000"/>
+              </a:lnSpc>
+              <a:buNone/>
+            </a:pPr>
+            <a:r>
+              <a:rPr lang="zh-CN" sz="1128" dirty="0">
+                <a:solidFill>
+                  <a:srgbClr val="1A1A18"/>
+                </a:solidFill>
+                <a:latin typeface="Noto Sans Mono CJK SC"/>
+                <a:ea typeface="Noto Sans Mono CJK SC"/>
+                <a:cs typeface="Noto Sans Mono CJK SC"/>
+              </a:rPr>
+              <a:t>        hash &amp;= ~high_bits;                     </a:t>
+            </a:r>
+            <a:r>
+              <a:rPr lang="zh-CN" sz="1128" dirty="0">
+                <a:solidFill>
+                  <a:srgbClr val="8A8A84"/>
+                </a:solidFill>
+                <a:latin typeface="Noto Sans Mono CJK SC"/>
+                <a:ea typeface="Noto Sans Mono CJK SC"/>
+                <a:cs typeface="Noto Sans Mono CJK SC"/>
+              </a:rPr>
+              <a:t>// 再把高 4 位清掉</a:t>
+            </a:r>
+          </a:p>
+          <a:p>
+            <a:pPr marL="0" indent="0" lvl="0">
+              <a:lnSpc>
+                <a:spcPct val="104000"/>
+              </a:lnSpc>
+              <a:buNone/>
+            </a:pPr>
+            <a:r>
+              <a:rPr lang="zh-CN" sz="1128" dirty="0">
+                <a:solidFill>
+                  <a:srgbClr val="1A1A18"/>
+                </a:solidFill>
+                <a:latin typeface="Noto Sans Mono CJK SC"/>
+                <a:ea typeface="Noto Sans Mono CJK SC"/>
+                <a:cs typeface="Noto Sans Mono CJK SC"/>
+              </a:rPr>
+              <a:t>    }</a:t>
+            </a:r>
+          </a:p>
+          <a:p>
+            <a:pPr marL="0" indent="0" lvl="0">
+              <a:lnSpc>
+                <a:spcPct val="104000"/>
+              </a:lnSpc>
+              <a:buNone/>
+            </a:pPr>
+            <a:r>
+              <a:rPr lang="zh-CN" sz="1128" dirty="0">
                 <a:solidFill>
                   <a:srgbClr val="1A1A18"/>
                 </a:solidFill>
@@ -2385,7 +2811,7 @@
               <a:t>    </a:t>
             </a:r>
             <a:r>
-              <a:rPr lang="zh-CN" sz="1284" dirty="0">
+              <a:rPr lang="zh-CN" sz="1128" dirty="0">
                 <a:solidFill>
                   <a:srgbClr val="8A4B2A"/>
                 </a:solidFill>
@@ -2393,62 +2819,18 @@
                 <a:ea typeface="Noto Sans Mono CJK SC"/>
                 <a:cs typeface="Noto Sans Mono CJK SC"/>
               </a:rPr>
-              <a:t>for</a:t>
-            </a:r>
-            <a:r>
-              <a:rPr lang="zh-CN" sz="1284" dirty="0">
-                <a:solidFill>
-                  <a:srgbClr val="1A1A18"/>
-                </a:solidFill>
-                <a:latin typeface="Noto Sans Mono CJK SC"/>
-                <a:ea typeface="Noto Sans Mono CJK SC"/>
-                <a:cs typeface="Noto Sans Mono CJK SC"/>
-              </a:rPr>
-              <a:t> (</a:t>
-            </a:r>
-            <a:r>
-              <a:rPr lang="zh-CN" sz="1284" dirty="0">
-                <a:solidFill>
-                  <a:srgbClr val="2C6B57"/>
-                </a:solidFill>
-                <a:latin typeface="Noto Sans Mono CJK SC"/>
-                <a:ea typeface="Noto Sans Mono CJK SC"/>
-                <a:cs typeface="Noto Sans Mono CJK SC"/>
-              </a:rPr>
-              <a:t>unsigned</a:t>
-            </a:r>
-            <a:r>
-              <a:rPr lang="zh-CN" sz="1284" dirty="0">
-                <a:solidFill>
-                  <a:srgbClr val="1A1A18"/>
-                </a:solidFill>
-                <a:latin typeface="Noto Sans Mono CJK SC"/>
-                <a:ea typeface="Noto Sans Mono CJK SC"/>
-                <a:cs typeface="Noto Sans Mono CJK SC"/>
-              </a:rPr>
-              <a:t> </a:t>
-            </a:r>
-            <a:r>
-              <a:rPr lang="zh-CN" sz="1284" dirty="0">
-                <a:solidFill>
-                  <a:srgbClr val="2C6B57"/>
-                </a:solidFill>
-                <a:latin typeface="Noto Sans Mono CJK SC"/>
-                <a:ea typeface="Noto Sans Mono CJK SC"/>
-                <a:cs typeface="Noto Sans Mono CJK SC"/>
-              </a:rPr>
-              <a:t>char</a:t>
-            </a:r>
-            <a:r>
-              <a:rPr lang="zh-CN" sz="1284" dirty="0">
-                <a:solidFill>
-                  <a:srgbClr val="1A1A18"/>
-                </a:solidFill>
-                <a:latin typeface="Noto Sans Mono CJK SC"/>
-                <a:ea typeface="Noto Sans Mono CJK SC"/>
-                <a:cs typeface="Noto Sans Mono CJK SC"/>
-              </a:rPr>
-              <a:t> character : text) {</a:t>
+              <a:t>return</a:t>
+            </a:r>
+            <a:r>
+              <a:rPr lang="zh-CN" sz="1128" dirty="0">
+                <a:solidFill>
+                  <a:srgbClr val="1A1A18"/>
+                </a:solidFill>
+                <a:latin typeface="Noto Sans Mono CJK SC"/>
+                <a:ea typeface="Noto Sans Mono CJK SC"/>
+                <a:cs typeface="Noto Sans Mono CJK SC"/>
+              </a:rPr>
+              <a:t> hash;</a:t>
             </a:r>
           </a:p>
           <a:p>
@@ -2459,357 +2841,7 @@
               <a:buNone/>
             </a:pPr>
             <a:r>
-              <a:rPr lang="zh-CN" sz="1284" dirty="0">
-                <a:solidFill>
-                  <a:srgbClr val="1A1A18"/>
-                </a:solidFill>
-                <a:latin typeface="Noto Sans Mono CJK SC"/>
-                <a:ea typeface="Noto Sans Mono CJK SC"/>
-                <a:cs typeface="Noto Sans Mono CJK SC"/>
-              </a:rPr>
-              <a:t>        hash = (hash &lt;&lt; </a:t>
-            </a:r>
-            <a:r>
-              <a:rPr lang="zh-CN" sz="1284" dirty="0">
-                <a:solidFill>
-                  <a:srgbClr val="4A5AA8"/>
-                </a:solidFill>
-                <a:latin typeface="Noto Sans Mono CJK SC"/>
-                <a:ea typeface="Noto Sans Mono CJK SC"/>
-                <a:cs typeface="Noto Sans Mono CJK SC"/>
-              </a:rPr>
-              <a:t>4U</a:t>
-            </a:r>
-            <a:r>
-              <a:rPr lang="zh-CN" sz="1284" dirty="0">
-                <a:solidFill>
-                  <a:srgbClr val="1A1A18"/>
-                </a:solidFill>
-                <a:latin typeface="Noto Sans Mono CJK SC"/>
-                <a:ea typeface="Noto Sans Mono CJK SC"/>
-                <a:cs typeface="Noto Sans Mono CJK SC"/>
-              </a:rPr>
-              <a:t>) + character;        </a:t>
-            </a:r>
-            <a:r>
-              <a:rPr lang="zh-CN" sz="1284" dirty="0">
-                <a:solidFill>
-                  <a:srgbClr val="8A8A84"/>
-                </a:solidFill>
-                <a:latin typeface="Noto Sans Mono CJK SC"/>
-                <a:ea typeface="Noto Sans Mono CJK SC"/>
-                <a:cs typeface="Noto Sans Mono CJK SC"/>
-              </a:rPr>
-              <a:t>// 左移 4 位，腾出位置放新字节</a:t>
-            </a:r>
-          </a:p>
-          <a:p>
-            <a:pPr marL="0" indent="0" lvl="0">
-              <a:lnSpc>
-                <a:spcPct val="104000"/>
-              </a:lnSpc>
-              <a:buNone/>
-            </a:pPr>
-            <a:r>
-              <a:rPr lang="zh-CN" sz="1284" dirty="0">
-                <a:solidFill>
-                  <a:srgbClr val="1A1A18"/>
-                </a:solidFill>
-                <a:latin typeface="Noto Sans Mono CJK SC"/>
-                <a:ea typeface="Noto Sans Mono CJK SC"/>
-                <a:cs typeface="Noto Sans Mono CJK SC"/>
-              </a:rPr>
-              <a:t>        std::</a:t>
-            </a:r>
-            <a:r>
-              <a:rPr lang="zh-CN" sz="1284" dirty="0">
-                <a:solidFill>
-                  <a:srgbClr val="2C6B57"/>
-                </a:solidFill>
-                <a:latin typeface="Noto Sans Mono CJK SC"/>
-                <a:ea typeface="Noto Sans Mono CJK SC"/>
-                <a:cs typeface="Noto Sans Mono CJK SC"/>
-              </a:rPr>
-              <a:t>size_t</a:t>
-            </a:r>
-            <a:r>
-              <a:rPr lang="zh-CN" sz="1284" dirty="0">
-                <a:solidFill>
-                  <a:srgbClr val="1A1A18"/>
-                </a:solidFill>
-                <a:latin typeface="Noto Sans Mono CJK SC"/>
-                <a:ea typeface="Noto Sans Mono CJK SC"/>
-                <a:cs typeface="Noto Sans Mono CJK SC"/>
-              </a:rPr>
-              <a:t> high_bits = hash &amp; </a:t>
-            </a:r>
-            <a:r>
-              <a:rPr lang="zh-CN" sz="1284" dirty="0">
-                <a:solidFill>
-                  <a:srgbClr val="4A5AA8"/>
-                </a:solidFill>
-                <a:latin typeface="Noto Sans Mono CJK SC"/>
-                <a:ea typeface="Noto Sans Mono CJK SC"/>
-                <a:cs typeface="Noto Sans Mono CJK SC"/>
-              </a:rPr>
-              <a:t>0xF0000000U</a:t>
-            </a:r>
-            <a:r>
-              <a:rPr lang="zh-CN" sz="1284" dirty="0">
-                <a:solidFill>
-                  <a:srgbClr val="1A1A18"/>
-                </a:solidFill>
-                <a:latin typeface="Noto Sans Mono CJK SC"/>
-                <a:ea typeface="Noto Sans Mono CJK SC"/>
-                <a:cs typeface="Noto Sans Mono CJK SC"/>
-              </a:rPr>
-              <a:t>;   </a:t>
-            </a:r>
-            <a:r>
-              <a:rPr lang="zh-CN" sz="1284" dirty="0">
-                <a:solidFill>
-                  <a:srgbClr val="8A8A84"/>
-                </a:solidFill>
-                <a:latin typeface="Noto Sans Mono CJK SC"/>
-                <a:ea typeface="Noto Sans Mono CJK SC"/>
-                <a:cs typeface="Noto Sans Mono CJK SC"/>
-              </a:rPr>
-              <a:t>// 溢出到高 4 位的那部分</a:t>
-            </a:r>
-          </a:p>
-          <a:p>
-            <a:pPr marL="0" indent="0" lvl="0">
-              <a:lnSpc>
-                <a:spcPct val="104000"/>
-              </a:lnSpc>
-              <a:buNone/>
-            </a:pPr>
-            <a:r>
-              <a:rPr lang="zh-CN" sz="1284" dirty="0">
-                <a:solidFill>
-                  <a:srgbClr val="1A1A18"/>
-                </a:solidFill>
-                <a:latin typeface="Noto Sans Mono CJK SC"/>
-                <a:ea typeface="Noto Sans Mono CJK SC"/>
-                <a:cs typeface="Noto Sans Mono CJK SC"/>
-              </a:rPr>
-              <a:t>        </a:t>
-            </a:r>
-            <a:r>
-              <a:rPr lang="zh-CN" sz="1284" dirty="0">
-                <a:solidFill>
-                  <a:srgbClr val="8A4B2A"/>
-                </a:solidFill>
-                <a:latin typeface="Noto Sans Mono CJK SC"/>
-                <a:ea typeface="Noto Sans Mono CJK SC"/>
-                <a:cs typeface="Noto Sans Mono CJK SC"/>
-              </a:rPr>
-              <a:t>if</a:t>
-            </a:r>
-            <a:r>
-              <a:rPr lang="zh-CN" sz="1284" dirty="0">
-                <a:solidFill>
-                  <a:srgbClr val="1A1A18"/>
-                </a:solidFill>
-                <a:latin typeface="Noto Sans Mono CJK SC"/>
-                <a:ea typeface="Noto Sans Mono CJK SC"/>
-                <a:cs typeface="Noto Sans Mono CJK SC"/>
-              </a:rPr>
-              <a:t> (high_bits != </a:t>
-            </a:r>
-            <a:r>
-              <a:rPr lang="zh-CN" sz="1284" dirty="0">
-                <a:solidFill>
-                  <a:srgbClr val="4A5AA8"/>
-                </a:solidFill>
-                <a:latin typeface="Noto Sans Mono CJK SC"/>
-                <a:ea typeface="Noto Sans Mono CJK SC"/>
-                <a:cs typeface="Noto Sans Mono CJK SC"/>
-              </a:rPr>
-              <a:t>0</a:t>
-            </a:r>
-            <a:r>
-              <a:rPr lang="zh-CN" sz="1284" dirty="0">
-                <a:solidFill>
-                  <a:srgbClr val="1A1A18"/>
-                </a:solidFill>
-                <a:latin typeface="Noto Sans Mono CJK SC"/>
-                <a:ea typeface="Noto Sans Mono CJK SC"/>
-                <a:cs typeface="Noto Sans Mono CJK SC"/>
-              </a:rPr>
-              <a:t>) {</a:t>
-            </a:r>
-          </a:p>
-          <a:p>
-            <a:pPr marL="0" indent="0" lvl="0">
-              <a:lnSpc>
-                <a:spcPct val="104000"/>
-              </a:lnSpc>
-              <a:buNone/>
-            </a:pPr>
-            <a:r>
-              <a:rPr lang="zh-CN" sz="1284" dirty="0">
-                <a:solidFill>
-                  <a:srgbClr val="1A1A18"/>
-                </a:solidFill>
-                <a:latin typeface="Noto Sans Mono CJK SC"/>
-                <a:ea typeface="Noto Sans Mono CJK SC"/>
-                <a:cs typeface="Noto Sans Mono CJK SC"/>
-              </a:rPr>
-              <a:t>            hash ^= high_bits &gt;&gt; </a:t>
-            </a:r>
-            <a:r>
-              <a:rPr lang="zh-CN" sz="1284" dirty="0">
-                <a:solidFill>
-                  <a:srgbClr val="4A5AA8"/>
-                </a:solidFill>
-                <a:latin typeface="Noto Sans Mono CJK SC"/>
-                <a:ea typeface="Noto Sans Mono CJK SC"/>
-                <a:cs typeface="Noto Sans Mono CJK SC"/>
-              </a:rPr>
-              <a:t>24U</a:t>
-            </a:r>
-            <a:r>
-              <a:rPr lang="zh-CN" sz="1284" dirty="0">
-                <a:solidFill>
-                  <a:srgbClr val="1A1A18"/>
-                </a:solidFill>
-                <a:latin typeface="Noto Sans Mono CJK SC"/>
-                <a:ea typeface="Noto Sans Mono CJK SC"/>
-                <a:cs typeface="Noto Sans Mono CJK SC"/>
-              </a:rPr>
-              <a:t>;           </a:t>
-            </a:r>
-            <a:r>
-              <a:rPr lang="zh-CN" sz="1284" dirty="0">
-                <a:solidFill>
-                  <a:srgbClr val="8A8A84"/>
-                </a:solidFill>
-                <a:latin typeface="Noto Sans Mono CJK SC"/>
-                <a:ea typeface="Noto Sans Mono CJK SC"/>
-                <a:cs typeface="Noto Sans Mono CJK SC"/>
-              </a:rPr>
-              <a:t>// 折回低位，别让它白白丢掉</a:t>
-            </a:r>
-          </a:p>
-          <a:p>
-            <a:pPr marL="0" indent="0" lvl="0">
-              <a:lnSpc>
-                <a:spcPct val="104000"/>
-              </a:lnSpc>
-              <a:buNone/>
-            </a:pPr>
-            <a:r>
-              <a:rPr lang="zh-CN" sz="1284" dirty="0">
-                <a:solidFill>
-                  <a:srgbClr val="1A1A18"/>
-                </a:solidFill>
-                <a:latin typeface="Noto Sans Mono CJK SC"/>
-                <a:ea typeface="Noto Sans Mono CJK SC"/>
-                <a:cs typeface="Noto Sans Mono CJK SC"/>
-              </a:rPr>
-              <a:t>        }</a:t>
-            </a:r>
-          </a:p>
-          <a:p>
-            <a:pPr marL="0" indent="0" lvl="0">
-              <a:lnSpc>
-                <a:spcPct val="104000"/>
-              </a:lnSpc>
-              <a:buNone/>
-            </a:pPr>
-            <a:r>
-              <a:rPr lang="zh-CN" sz="1284" dirty="0">
-                <a:solidFill>
-                  <a:srgbClr val="1A1A18"/>
-                </a:solidFill>
-                <a:latin typeface="Noto Sans Mono CJK SC"/>
-                <a:ea typeface="Noto Sans Mono CJK SC"/>
-                <a:cs typeface="Noto Sans Mono CJK SC"/>
-              </a:rPr>
-              <a:t>        hash &amp;= ~high_bits;                     </a:t>
-            </a:r>
-            <a:r>
-              <a:rPr lang="zh-CN" sz="1284" dirty="0">
-                <a:solidFill>
-                  <a:srgbClr val="8A8A84"/>
-                </a:solidFill>
-                <a:latin typeface="Noto Sans Mono CJK SC"/>
-                <a:ea typeface="Noto Sans Mono CJK SC"/>
-                <a:cs typeface="Noto Sans Mono CJK SC"/>
-              </a:rPr>
-              <a:t>// 再把高 4 位清掉</a:t>
-            </a:r>
-          </a:p>
-          <a:p>
-            <a:pPr marL="0" indent="0" lvl="0">
-              <a:lnSpc>
-                <a:spcPct val="104000"/>
-              </a:lnSpc>
-              <a:buNone/>
-            </a:pPr>
-            <a:r>
-              <a:rPr lang="zh-CN" sz="1284" dirty="0">
-                <a:solidFill>
-                  <a:srgbClr val="1A1A18"/>
-                </a:solidFill>
-                <a:latin typeface="Noto Sans Mono CJK SC"/>
-                <a:ea typeface="Noto Sans Mono CJK SC"/>
-                <a:cs typeface="Noto Sans Mono CJK SC"/>
-              </a:rPr>
-              <a:t>    }</a:t>
-            </a:r>
-          </a:p>
-          <a:p>
-            <a:pPr marL="0" indent="0" lvl="0">
-              <a:lnSpc>
-                <a:spcPct val="104000"/>
-              </a:lnSpc>
-              <a:buNone/>
-            </a:pPr>
-            <a:r>
-              <a:rPr lang="zh-CN" sz="1284" dirty="0">
-                <a:solidFill>
-                  <a:srgbClr val="1A1A18"/>
-                </a:solidFill>
-                <a:latin typeface="Noto Sans Mono CJK SC"/>
-                <a:ea typeface="Noto Sans Mono CJK SC"/>
-                <a:cs typeface="Noto Sans Mono CJK SC"/>
-              </a:rPr>
-              <a:t>    </a:t>
-            </a:r>
-            <a:r>
-              <a:rPr lang="zh-CN" sz="1284" dirty="0">
-                <a:solidFill>
-                  <a:srgbClr val="8A4B2A"/>
-                </a:solidFill>
-                <a:latin typeface="Noto Sans Mono CJK SC"/>
-                <a:ea typeface="Noto Sans Mono CJK SC"/>
-                <a:cs typeface="Noto Sans Mono CJK SC"/>
-              </a:rPr>
-              <a:t>return</a:t>
-            </a:r>
-            <a:r>
-              <a:rPr lang="zh-CN" sz="1284" dirty="0">
-                <a:solidFill>
-                  <a:srgbClr val="1A1A18"/>
-                </a:solidFill>
-                <a:latin typeface="Noto Sans Mono CJK SC"/>
-                <a:ea typeface="Noto Sans Mono CJK SC"/>
-                <a:cs typeface="Noto Sans Mono CJK SC"/>
-              </a:rPr>
-              <a:t> hash;</a:t>
-            </a:r>
-          </a:p>
-          <a:p>
-            <a:pPr marL="0" indent="0" lvl="0">
-              <a:lnSpc>
-                <a:spcPct val="104000"/>
-              </a:lnSpc>
-              <a:buNone/>
-            </a:pPr>
-            <a:r>
-              <a:rPr lang="zh-CN" sz="1284" dirty="0">
+              <a:rPr lang="zh-CN" sz="1128" dirty="0">
                 <a:solidFill>
                   <a:srgbClr val="1A1A18"/>
                 </a:solidFill>

--- a/book/slides/pptx/ch10-search.pptx
+++ b/book/slides/pptx/ch10-search.pptx
@@ -180,7 +180,7 @@
                 <a:ea typeface="Noto Sans CJK SC"/>
                 <a:cs typeface="Segoe UI"/>
               </a:rPr>
-              <a:t>按无符号读得到 0xF02D，按有符号读会被符号扩展成 0xFFFFFF000FFF00DD。</a:t>
+              <a:t>按无符号读得到 0xF02D，按有符号读会被符号扩展，得 0x0FFF00DD。</a:t>
             </a:r>
           </a:p>
         </p:txBody>
